--- a/test/U3_Query_Flow.pptx
+++ b/test/U3_Query_Flow.pptx
@@ -4376,8 +4376,9 @@
                   <a:srgbClr val="175CA6"/>
                 </a:solidFill>
               </a:rPr>
-              <a:t>prompt +
-snapshot</a:t>
+              <a:t>SYSTEM_PROMPT
++ snapshot
++ history</a:t>
             </a:r>
           </a:p>
         </p:txBody>
@@ -5868,7 +5869,7 @@
                   <a:srgbClr val="444444"/>
                 </a:solidFill>
               </a:rPr>
-              <a:t>HTTP POST {session, message} to Orchestrator /chat</a:t>
+              <a:t>HTTP POST {session_id, message} → Orchestrator /chat  (pure stdlib urllib; --session flag for named sessions)</a:t>
             </a:r>
           </a:p>
         </p:txBody>
@@ -6060,7 +6061,7 @@
                   <a:srgbClr val="444444"/>
                 </a:solidFill>
               </a:rPr>
-              <a:t>Injects live network snapshot into system prompt; calls Gemini</a:t>
+              <a:t>Calls build_network_context() → GET /network; appends live snapshot to SYSTEM_PROMPT</a:t>
             </a:r>
           </a:p>
         </p:txBody>
@@ -6159,7 +6160,7 @@
             <a:avLst/>
           </a:prstGeom>
           <a:solidFill>
-            <a:srgbClr val="5A238C"/>
+            <a:srgbClr val="0A2955"/>
           </a:solidFill>
           <a:ln w="3810">
             <a:solidFill>
@@ -6218,7 +6219,7 @@
                   <a:srgbClr val="FFFFFF"/>
                 </a:solidFill>
               </a:rPr>
-              <a:t>Gemini LLM</a:t>
+              <a:t>Orchestrator</a:t>
             </a:r>
           </a:p>
         </p:txBody>
@@ -6252,7 +6253,7 @@
                   <a:srgbClr val="444444"/>
                 </a:solidFill>
               </a:rPr>
-              <a:t>Decides query_network is the correct tool; emits function call</a:t>
+              <a:t>Sends SYSTEM_PROMPT + live snapshot + session history (types.Content) to Gemini</a:t>
             </a:r>
           </a:p>
         </p:txBody>
@@ -6351,7 +6352,7 @@
             <a:avLst/>
           </a:prstGeom>
           <a:solidFill>
-            <a:srgbClr val="0A2955"/>
+            <a:srgbClr val="5A238C"/>
           </a:solidFill>
           <a:ln w="3810">
             <a:solidFill>
@@ -6410,7 +6411,7 @@
                   <a:srgbClr val="FFFFFF"/>
                 </a:solidFill>
               </a:rPr>
-              <a:t>Orchestrator</a:t>
+              <a:t>Gemini LLM</a:t>
             </a:r>
           </a:p>
         </p:txBody>
@@ -6444,7 +6445,7 @@
                   <a:srgbClr val="444444"/>
                 </a:solidFill>
               </a:rPr>
-              <a:t>Dispatches query_network → GET /network on Controller</a:t>
+              <a:t>Decides query_network is the correct tool; emits function call: query_network()</a:t>
             </a:r>
           </a:p>
         </p:txBody>
@@ -6543,7 +6544,7 @@
             <a:avLst/>
           </a:prstGeom>
           <a:solidFill>
-            <a:srgbClr val="007E8A"/>
+            <a:srgbClr val="0A2955"/>
           </a:solidFill>
           <a:ln w="3810">
             <a:solidFill>
@@ -6602,7 +6603,7 @@
                   <a:srgbClr val="FFFFFF"/>
                 </a:solidFill>
               </a:rPr>
-              <a:t>Controller</a:t>
+              <a:t>Orchestrator</a:t>
             </a:r>
           </a:p>
         </p:txBody>
@@ -6636,7 +6637,7 @@
                   <a:srgbClr val="444444"/>
                 </a:solidFill>
               </a:rPr>
-              <a:t>Reads topology.json for cell/DU/CU configuration</a:t>
+              <a:t>Dispatches query_network → GET /network on Controller; yields *[calling tool...]* inline</a:t>
             </a:r>
           </a:p>
         </p:txBody>
@@ -6828,7 +6829,7 @@
                   <a:srgbClr val="444444"/>
                 </a:solidFill>
               </a:rPr>
-              <a:t>Runs Flux query against InfluxDB: latest connected_ues per cell</a:t>
+              <a:t>Reads topology.json for cell/DU/CU configuration</a:t>
             </a:r>
           </a:p>
         </p:txBody>
@@ -7020,7 +7021,7 @@
                   <a:srgbClr val="444444"/>
                 </a:solidFill>
               </a:rPr>
-              <a:t>Merges topology + KPIs; returns full 30-cell network snapshot</a:t>
+              <a:t>Runs Flux query against InfluxDB: latest connected_ues per cell</a:t>
             </a:r>
           </a:p>
         </p:txBody>
@@ -7119,7 +7120,7 @@
             <a:avLst/>
           </a:prstGeom>
           <a:solidFill>
-            <a:srgbClr val="0A2955"/>
+            <a:srgbClr val="007E8A"/>
           </a:solidFill>
           <a:ln w="3810">
             <a:solidFill>
@@ -7178,7 +7179,7 @@
                   <a:srgbClr val="FFFFFF"/>
                 </a:solidFill>
               </a:rPr>
-              <a:t>Orchestrator</a:t>
+              <a:t>Controller</a:t>
             </a:r>
           </a:p>
         </p:txBody>
@@ -7212,7 +7213,7 @@
                   <a:srgbClr val="444444"/>
                 </a:solidFill>
               </a:rPr>
-              <a:t>Passes tool result back to Gemini</a:t>
+              <a:t>Merges topology + KPIs; returns full 30-cell network snapshot</a:t>
             </a:r>
           </a:p>
         </p:txBody>
@@ -7311,7 +7312,7 @@
             <a:avLst/>
           </a:prstGeom>
           <a:solidFill>
-            <a:srgbClr val="5A238C"/>
+            <a:srgbClr val="0A2955"/>
           </a:solidFill>
           <a:ln w="3810">
             <a:solidFill>
@@ -7370,7 +7371,7 @@
                   <a:srgbClr val="FFFFFF"/>
                 </a:solidFill>
               </a:rPr>
-              <a:t>Gemini LLM</a:t>
+              <a:t>Orchestrator</a:t>
             </a:r>
           </a:p>
         </p:txBody>
@@ -7404,7 +7405,7 @@
                   <a:srgbClr val="444444"/>
                 </a:solidFill>
               </a:rPr>
-              <a:t>Ranks all 30 cells by connected_ues; identifies the cell with the highest count</a:t>
+              <a:t>JSON-sanitises result (json.dumps default=str); appends FunctionResponse to session history; re-calls Gemini</a:t>
             </a:r>
           </a:p>
         </p:txBody>
@@ -7596,7 +7597,7 @@
                   <a:srgbClr val="444444"/>
                 </a:solidFill>
               </a:rPr>
-              <a:t>Generates natural language answer: "Cell X is serving the most UEs with Y connected."</a:t>
+              <a:t>Ranks all 30 cells by connected_ues desc; identifies top cell; no further tool calls → loop exits</a:t>
             </a:r>
           </a:p>
         </p:txBody>
@@ -7695,7 +7696,7 @@
             <a:avLst/>
           </a:prstGeom>
           <a:solidFill>
-            <a:srgbClr val="0A2955"/>
+            <a:srgbClr val="5A238C"/>
           </a:solidFill>
           <a:ln w="3810">
             <a:solidFill>
@@ -7754,7 +7755,7 @@
                   <a:srgbClr val="FFFFFF"/>
                 </a:solidFill>
               </a:rPr>
-              <a:t>Orchestrator</a:t>
+              <a:t>Gemini LLM</a:t>
             </a:r>
           </a:p>
         </p:txBody>
@@ -7788,7 +7789,7 @@
                   <a:srgbClr val="444444"/>
                 </a:solidFill>
               </a:rPr>
-              <a:t>Returns HTTP response {reply} to chat.py</a:t>
+              <a:t>Generates NL answer: "MLS_RWS_01 is serving the most UEs with X connected."</a:t>
             </a:r>
           </a:p>
         </p:txBody>
@@ -7887,6 +7888,198 @@
             <a:avLst/>
           </a:prstGeom>
           <a:solidFill>
+            <a:srgbClr val="0A2955"/>
+          </a:solidFill>
+          <a:ln w="3810">
+            <a:solidFill>
+              <a:srgbClr val="AAAAAA"/>
+            </a:solidFill>
+          </a:ln>
+        </p:spPr>
+        <p:style>
+          <a:lnRef idx="1">
+            <a:schemeClr val="accent1"/>
+          </a:lnRef>
+          <a:fillRef idx="3">
+            <a:schemeClr val="accent1"/>
+          </a:fillRef>
+          <a:effectRef idx="2">
+            <a:schemeClr val="accent1"/>
+          </a:effectRef>
+          <a:fontRef idx="minor">
+            <a:schemeClr val="lt1"/>
+          </a:fontRef>
+        </p:style>
+        <p:txBody>
+          <a:bodyPr rtlCol="0" anchor="ctr"/>
+          <a:lstStyle/>
+          <a:p>
+            <a:pPr algn="ctr"/>
+          </a:p>
+        </p:txBody>
+      </p:sp>
+      <p:sp>
+        <p:nvSpPr>
+          <p:cNvPr id="68" name="TextBox 67"/>
+          <p:cNvSpPr txBox="1"/>
+          <p:nvPr/>
+        </p:nvSpPr>
+        <p:spPr>
+          <a:xfrm>
+            <a:off x="868680" y="6035040"/>
+            <a:ext cx="1463040" cy="274320"/>
+          </a:xfrm>
+          <a:prstGeom prst="rect">
+            <a:avLst/>
+          </a:prstGeom>
+          <a:noFill/>
+        </p:spPr>
+        <p:txBody>
+          <a:bodyPr wrap="square">
+            <a:spAutoFit/>
+          </a:bodyPr>
+          <a:lstStyle/>
+          <a:p>
+            <a:pPr algn="ctr"/>
+            <a:r>
+              <a:rPr sz="900" b="1" i="0">
+                <a:solidFill>
+                  <a:srgbClr val="FFFFFF"/>
+                </a:solidFill>
+              </a:rPr>
+              <a:t>Orchestrator</a:t>
+            </a:r>
+          </a:p>
+        </p:txBody>
+      </p:sp>
+      <p:sp>
+        <p:nvSpPr>
+          <p:cNvPr id="69" name="TextBox 68"/>
+          <p:cNvSpPr txBox="1"/>
+          <p:nvPr/>
+        </p:nvSpPr>
+        <p:spPr>
+          <a:xfrm>
+            <a:off x="2423160" y="6007608"/>
+            <a:ext cx="9418320" cy="329184"/>
+          </a:xfrm>
+          <a:prstGeom prst="rect">
+            <a:avLst/>
+          </a:prstGeom>
+          <a:noFill/>
+        </p:spPr>
+        <p:txBody>
+          <a:bodyPr wrap="square">
+            <a:spAutoFit/>
+          </a:bodyPr>
+          <a:lstStyle/>
+          <a:p>
+            <a:pPr algn="l"/>
+            <a:r>
+              <a:rPr sz="1000" b="0" i="0">
+                <a:solidFill>
+                  <a:srgbClr val="444444"/>
+                </a:solidFill>
+              </a:rPr>
+              <a:t>Streams text/plain chunks via sync generator (Starlette thread pool → StreamingResponse)</a:t>
+            </a:r>
+          </a:p>
+        </p:txBody>
+      </p:sp>
+      <p:sp>
+        <p:nvSpPr>
+          <p:cNvPr id="70" name="Rectangle 69"/>
+          <p:cNvSpPr/>
+          <p:nvPr/>
+        </p:nvSpPr>
+        <p:spPr>
+          <a:xfrm>
+            <a:off x="274320" y="6382512"/>
+            <a:ext cx="11612880" cy="420624"/>
+          </a:xfrm>
+          <a:prstGeom prst="rect">
+            <a:avLst/>
+          </a:prstGeom>
+          <a:solidFill>
+            <a:srgbClr val="E8ECF2"/>
+          </a:solidFill>
+          <a:ln w="3810">
+            <a:solidFill>
+              <a:srgbClr val="CCCCCC"/>
+            </a:solidFill>
+          </a:ln>
+        </p:spPr>
+        <p:style>
+          <a:lnRef idx="1">
+            <a:schemeClr val="accent1"/>
+          </a:lnRef>
+          <a:fillRef idx="3">
+            <a:schemeClr val="accent1"/>
+          </a:fillRef>
+          <a:effectRef idx="2">
+            <a:schemeClr val="accent1"/>
+          </a:effectRef>
+          <a:fontRef idx="minor">
+            <a:schemeClr val="lt1"/>
+          </a:fontRef>
+        </p:style>
+        <p:txBody>
+          <a:bodyPr rtlCol="0" anchor="ctr"/>
+          <a:lstStyle/>
+          <a:p>
+            <a:pPr algn="ctr"/>
+          </a:p>
+        </p:txBody>
+      </p:sp>
+      <p:sp>
+        <p:nvSpPr>
+          <p:cNvPr id="71" name="TextBox 70"/>
+          <p:cNvSpPr txBox="1"/>
+          <p:nvPr/>
+        </p:nvSpPr>
+        <p:spPr>
+          <a:xfrm>
+            <a:off x="320040" y="6428232"/>
+            <a:ext cx="502920" cy="329184"/>
+          </a:xfrm>
+          <a:prstGeom prst="rect">
+            <a:avLst/>
+          </a:prstGeom>
+          <a:noFill/>
+        </p:spPr>
+        <p:txBody>
+          <a:bodyPr wrap="square">
+            <a:spAutoFit/>
+          </a:bodyPr>
+          <a:lstStyle/>
+          <a:p>
+            <a:pPr algn="ctr"/>
+            <a:r>
+              <a:rPr sz="1100" b="1" i="0">
+                <a:solidFill>
+                  <a:srgbClr val="0A2955"/>
+                </a:solidFill>
+              </a:rPr>
+              <a:t>14</a:t>
+            </a:r>
+          </a:p>
+        </p:txBody>
+      </p:sp>
+      <p:sp>
+        <p:nvSpPr>
+          <p:cNvPr id="72" name="Rectangle 71"/>
+          <p:cNvSpPr/>
+          <p:nvPr/>
+        </p:nvSpPr>
+        <p:spPr>
+          <a:xfrm>
+            <a:off x="868680" y="6455664"/>
+            <a:ext cx="1463040" cy="274320"/>
+          </a:xfrm>
+          <a:prstGeom prst="rect">
+            <a:avLst/>
+          </a:prstGeom>
+          <a:solidFill>
             <a:srgbClr val="175CA6"/>
           </a:solidFill>
           <a:ln w="3810">
@@ -7919,13 +8112,13 @@
       </p:sp>
       <p:sp>
         <p:nvSpPr>
-          <p:cNvPr id="68" name="TextBox 67"/>
+          <p:cNvPr id="73" name="TextBox 72"/>
           <p:cNvSpPr txBox="1"/>
           <p:nvPr/>
         </p:nvSpPr>
         <p:spPr>
           <a:xfrm>
-            <a:off x="868680" y="6035040"/>
+            <a:off x="868680" y="6455664"/>
             <a:ext cx="1463040" cy="274320"/>
           </a:xfrm>
           <a:prstGeom prst="rect">
@@ -7953,13 +8146,13 @@
       </p:sp>
       <p:sp>
         <p:nvSpPr>
-          <p:cNvPr id="69" name="TextBox 68"/>
+          <p:cNvPr id="74" name="TextBox 73"/>
           <p:cNvSpPr txBox="1"/>
           <p:nvPr/>
         </p:nvSpPr>
         <p:spPr>
           <a:xfrm>
-            <a:off x="2423160" y="6007608"/>
+            <a:off x="2423160" y="6428232"/>
             <a:ext cx="9418320" cy="329184"/>
           </a:xfrm>
           <a:prstGeom prst="rect">
@@ -7980,7 +8173,7 @@
                   <a:srgbClr val="444444"/>
                 </a:solidFill>
               </a:rPr>
-              <a:t>Prints answer to user</a:t>
+              <a:t>Prints streamed answer to operator terminal</a:t>
             </a:r>
           </a:p>
         </p:txBody>
